--- a/owner_inbox/archive/cv_archive/6486_TrainingPM_Elbit_Netanya/v4_Inon_Baasov_CV_TrainingPM.pptx
+++ b/owner_inbox/archive/cv_archive/6486_TrainingPM_Elbit_Netanya/v4_Inon_Baasov_CV_TrainingPM.pptx
@@ -404,7 +404,7 @@
           <a:p>
             <a:fld id="{963396E7-87BF-864A-BE04-A221C272D6E1}" type="datetimeFigureOut">
               <a:rPr lang="en-US" smtClean="0"/>
-              <a:t>1/25/2026</a:t>
+              <a:t>5/6/2026</a:t>
             </a:fld>
             <a:endParaRPr lang="en-US" dirty="0"/>
           </a:p>
@@ -581,7 +581,7 @@
           <a:p>
             <a:fld id="{D9BDC7F0-27B3-48E7-9288-964E7EEDAEE4}" type="datetimeFigureOut">
               <a:rPr lang="en-US" smtClean="0"/>
-              <a:t>1/25/2026</a:t>
+              <a:t>5/6/2026</a:t>
             </a:fld>
             <a:endParaRPr lang="en-US" dirty="0"/>
           </a:p>
@@ -7070,7 +7070,7 @@
           <a:p>
             <a:fld id="{612E597E-2F4F-2747-A9DF-6BACAD15E325}" type="datetimeFigureOut">
               <a:rPr lang="en-US" smtClean="0"/>
-              <a:t>1/25/2026</a:t>
+              <a:t>5/6/2026</a:t>
             </a:fld>
             <a:endParaRPr lang="en-US" dirty="0"/>
           </a:p>
@@ -7695,7 +7695,7 @@
         </p:nvGrpSpPr>
         <p:grpSpPr>
           <a:xfrm>
-            <a:off x="466520" y="9263407"/>
+            <a:off x="466520" y="9225307"/>
             <a:ext cx="6645792" cy="936311"/>
             <a:chOff x="93673" y="1854031"/>
             <a:chExt cx="2936874" cy="349897"/>
@@ -8563,10 +8563,10 @@
         </p:nvGrpSpPr>
         <p:grpSpPr>
           <a:xfrm>
-            <a:off x="359504" y="2989292"/>
-            <a:ext cx="6726870" cy="6350669"/>
+            <a:off x="359504" y="2882612"/>
+            <a:ext cx="6726870" cy="6434491"/>
             <a:chOff x="161926" y="3425452"/>
-            <a:chExt cx="6590843" cy="4656183"/>
+            <a:chExt cx="6590843" cy="4717636"/>
           </a:xfrm>
         </p:grpSpPr>
         <p:grpSp>
@@ -8584,9 +8584,9 @@
           <p:grpSpPr>
             <a:xfrm>
               <a:off x="161926" y="3425452"/>
-              <a:ext cx="6590843" cy="4656183"/>
+              <a:ext cx="6590843" cy="4717636"/>
               <a:chOff x="78398" y="3403413"/>
-              <a:chExt cx="6718755" cy="3496306"/>
+              <a:chExt cx="6718755" cy="3542452"/>
             </a:xfrm>
           </p:grpSpPr>
           <p:grpSp>
@@ -8604,9 +8604,9 @@
             <p:grpSpPr>
               <a:xfrm>
                 <a:off x="78398" y="3403413"/>
-                <a:ext cx="6718755" cy="3496306"/>
+                <a:ext cx="6718755" cy="3542452"/>
                 <a:chOff x="-24741" y="2575123"/>
-                <a:chExt cx="6949855" cy="2711605"/>
+                <a:chExt cx="6949855" cy="2747394"/>
               </a:xfrm>
             </p:grpSpPr>
             <p:sp>
@@ -8625,7 +8625,7 @@
               </p:nvSpPr>
               <p:spPr>
                 <a:xfrm>
-                  <a:off x="-24741" y="4192938"/>
+                  <a:off x="-24741" y="4212460"/>
                   <a:ext cx="6943718" cy="665486"/>
                 </a:xfrm>
                 <a:prstGeom prst="rect">
@@ -9169,7 +9169,7 @@
               </p:nvSpPr>
               <p:spPr>
                 <a:xfrm>
-                  <a:off x="-18603" y="4820463"/>
+                  <a:off x="-18603" y="4843238"/>
                   <a:ext cx="6943717" cy="236466"/>
                 </a:xfrm>
                 <a:prstGeom prst="rect">
@@ -9447,7 +9447,7 @@
               </p:nvSpPr>
               <p:spPr>
                 <a:xfrm>
-                  <a:off x="-6035" y="5050262"/>
+                  <a:off x="-6035" y="5086051"/>
                   <a:ext cx="6931149" cy="236466"/>
                 </a:xfrm>
                 <a:prstGeom prst="rect">
@@ -9716,7 +9716,7 @@
             </p:nvSpPr>
             <p:spPr>
               <a:xfrm>
-                <a:off x="78399" y="4415821"/>
+                <a:off x="78399" y="4428406"/>
                 <a:ext cx="6713716" cy="1140922"/>
               </a:xfrm>
               <a:prstGeom prst="rect">
@@ -9919,17 +9919,8 @@
                   <a:rPr lang="en-US" sz="1100" dirty="0">
                     <a:latin typeface="Overpass" pitchFamily="2" charset="0"/>
                   </a:rPr>
-                  <a:t>Led development processes, defining user stories and acceptance criteria in collaboration with engineering and algorithm teams, boosting efficiency by </a:t>
+                  <a:t>Led development processes, defining user stories and acceptance criteria in collaboration with engineering and algorithm teams, boosting efficiency by 38%.</a:t>
                 </a:r>
-                <a:r>
-                  <a:rPr lang="en-US" sz="1100">
-                    <a:latin typeface="Overpass" pitchFamily="2" charset="0"/>
-                  </a:rPr>
-                  <a:t>38%.</a:t>
-                </a:r>
-                <a:endParaRPr lang="en-US" sz="1100" dirty="0">
-                  <a:latin typeface="Overpass" pitchFamily="2" charset="0"/>
-                </a:endParaRPr>
               </a:p>
             </p:txBody>
           </p:sp>
@@ -10352,7 +10343,7 @@
         <p:spPr>
           <a:xfrm>
             <a:off x="365760" y="1176157"/>
-            <a:ext cx="6828155" cy="207705"/>
+            <a:ext cx="6828155" cy="169277"/>
           </a:xfrm>
           <a:prstGeom prst="rect">
             <a:avLst/>
@@ -10360,22 +10351,34 @@
           <a:noFill/>
         </p:spPr>
         <p:txBody>
-          <a:bodyPr wrap="square" lIns="0" rIns="0" tIns="0" bIns="0">
+          <a:bodyPr wrap="square" lIns="0" tIns="0" rIns="0" bIns="0">
             <a:spAutoFit/>
           </a:bodyPr>
           <a:lstStyle/>
           <a:p>
             <a:r>
-              <a:rPr sz="1100" b="1">
+              <a:rPr sz="1100" b="1" dirty="0">
                 <a:latin typeface="Overpass"/>
               </a:rPr>
               <a:t>Portfolio  </a:t>
             </a:r>
             <a:r>
-              <a:rPr sz="1100">
+              <a:rPr sz="1100" dirty="0">
                 <a:latin typeface="Overpass"/>
               </a:rPr>
-              <a:t>inonbaasov-website.base44.app</a:t>
+              <a:t>inon</a:t>
+            </a:r>
+            <a:r>
+              <a:rPr lang="en-US" sz="1100" dirty="0">
+                <a:latin typeface="Overpass"/>
+              </a:rPr>
+              <a:t>-</a:t>
+            </a:r>
+            <a:r>
+              <a:rPr sz="1100" dirty="0">
+                <a:latin typeface="Overpass"/>
+              </a:rPr>
+              <a:t>baasov-website.base44.app</a:t>
             </a:r>
           </a:p>
         </p:txBody>
